--- a/OnTestIsolation.pptx
+++ b/OnTestIsolation.pptx
@@ -13831,7 +13831,7 @@
           <a:p>
             <a:fld id="{16B7F7DD-45BB-4493-8CC5-1954DE8DCD66}" type="datetimeFigureOut">
               <a:rPr lang="en-SI" smtClean="0"/>
-              <a:t>23/09/2024</a:t>
+              <a:t>18/10/2024</a:t>
             </a:fld>
             <a:endParaRPr lang="en-SI"/>
           </a:p>
@@ -14036,7 +14036,7 @@
           <a:p>
             <a:fld id="{16B7F7DD-45BB-4493-8CC5-1954DE8DCD66}" type="datetimeFigureOut">
               <a:rPr lang="en-SI" smtClean="0"/>
-              <a:t>23/09/2024</a:t>
+              <a:t>18/10/2024</a:t>
             </a:fld>
             <a:endParaRPr lang="en-SI"/>
           </a:p>
@@ -18800,10 +18800,10 @@
       </p:sp>
       <p:pic>
         <p:nvPicPr>
-          <p:cNvPr id="6" name="Picture 5">
+          <p:cNvPr id="3" name="Picture 2">
             <a:extLst>
               <a:ext uri="{FF2B5EF4-FFF2-40B4-BE49-F238E27FC236}">
-                <a16:creationId xmlns:a16="http://schemas.microsoft.com/office/drawing/2014/main" id="{F420242D-111F-E842-A5E1-815CFEB15942}"/>
+                <a16:creationId xmlns:a16="http://schemas.microsoft.com/office/drawing/2014/main" id="{3B590FD1-B77A-4796-3BE1-5D78D1ED477B}"/>
               </a:ext>
             </a:extLst>
           </p:cNvPr>
